--- a/classes/parte-18-ia-aplicada-a-la-ciberseguridad/336-osint-y-auditoria-web-con-agentes-de-ia/clase-336-presentacion.pptx
+++ b/classes/parte-18-ia-aplicada-a-la-ciberseguridad/336-osint-y-auditoria-web-con-agentes-de-ia/clase-336-presentacion.pptx
@@ -17,6 +17,10 @@
     <p:sldId id="265" r:id="rId16"/>
     <p:sldId id="266" r:id="rId17"/>
     <p:sldId id="267" r:id="rId18"/>
+    <p:sldId id="268" r:id="rId19"/>
+    <p:sldId id="269" r:id="rId20"/>
+    <p:sldId id="270" r:id="rId21"/>
+    <p:sldId id="271" r:id="rId22"/>
   </p:sldIdLst>
   <p:sldSz cx="9144000" cy="6858000" type="screen4x3"/>
   <p:notesSz cx="6858000" cy="9144000"/>
@@ -3198,7 +3202,7 @@
                   <a:srgbClr val="0B3D2E"/>
                 </a:solidFill>
               </a:rPr>
-              <a:t>⚠️ Errores comunes</a:t>
+              <a:t>🧪 Laboratorio guiado</a:t>
             </a:r>
           </a:p>
         </p:txBody>
@@ -3236,52 +3240,67 @@
                   <a:srgbClr val="22282E"/>
                 </a:solidFill>
               </a:rPr>
-              <a:t>•  Tomar cada hallazgo del escáner como real — Sobre-reporte. Valida antes de incluirlo.</a:t>
-            </a:r>
-          </a:p>
-          <a:p>
-            <a:pPr>
-              <a:spcAft>
-                <a:spcPts val="600"/>
-              </a:spcAft>
-            </a:pPr>
-            <a:r>
-              <a:rPr sz="1500">
-                <a:solidFill>
-                  <a:srgbClr val="22282E"/>
-                </a:solidFill>
-              </a:rPr>
-              <a:t>•  Hacer OSINT intrusivo o sobre personas sin base — Cruza líneas legales/éticas. Limítate a lo público y pertinente.</a:t>
-            </a:r>
-          </a:p>
-          <a:p>
-            <a:pPr>
-              <a:spcAft>
-                <a:spcPts val="600"/>
-              </a:spcAft>
-            </a:pPr>
-            <a:r>
-              <a:rPr sz="1500">
-                <a:solidFill>
-                  <a:srgbClr val="22282E"/>
-                </a:solidFill>
-              </a:rPr>
-              <a:t>•  Auditar una web que no es tuya "para probar" — Ilegal sin permiso. Usa tu laboratorio.</a:t>
-            </a:r>
-          </a:p>
-          <a:p>
-            <a:pPr>
-              <a:spcAft>
-                <a:spcPts val="600"/>
-              </a:spcAft>
-            </a:pPr>
-            <a:r>
-              <a:rPr sz="1500">
-                <a:solidFill>
-                  <a:srgbClr val="22282E"/>
-                </a:solidFill>
-              </a:rPr>
-              <a:t>•  Confiar en versiones detectadas sin confirmar — El fingerprinting se equivoca; verifica.</a:t>
+              <a:t>•  OSINT de dominio propio. Pide al agente un resumen de la huella pública de un dominio tuyo y verifica cada dato (DNS, subdominios) a mano.</a:t>
+            </a:r>
+          </a:p>
+          <a:p>
+            <a:pPr>
+              <a:spcAft>
+                <a:spcPts val="600"/>
+              </a:spcAft>
+            </a:pPr>
+            <a:r>
+              <a:rPr sz="1500">
+                <a:solidFill>
+                  <a:srgbClr val="22282E"/>
+                </a:solidFill>
+              </a:rPr>
+              <a:t>•  Fingerprinting. Sobre tu app de laboratorio, ejecuta el flujo de auditoría web y revisa la tecnología detectada.</a:t>
+            </a:r>
+          </a:p>
+          <a:p>
+            <a:pPr>
+              <a:spcAft>
+                <a:spcPts val="600"/>
+              </a:spcAft>
+            </a:pPr>
+            <a:r>
+              <a:rPr sz="1500">
+                <a:solidFill>
+                  <a:srgbClr val="22282E"/>
+                </a:solidFill>
+              </a:rPr>
+              <a:t>•  Checks OWASP. Deja que el agente proponga posibles problemas (cabeceras, versiones) y clasifícalos en confirmado / a verificar / falso positivo.</a:t>
+            </a:r>
+          </a:p>
+          <a:p>
+            <a:pPr>
+              <a:spcAft>
+                <a:spcPts val="600"/>
+              </a:spcAft>
+            </a:pPr>
+            <a:r>
+              <a:rPr sz="1500">
+                <a:solidFill>
+                  <a:srgbClr val="22282E"/>
+                </a:solidFill>
+              </a:rPr>
+              <a:t>•  Validación. Confirma manualmente 3 hallazgos con Burp/curl.</a:t>
+            </a:r>
+          </a:p>
+          <a:p>
+            <a:pPr>
+              <a:spcAft>
+                <a:spcPts val="600"/>
+              </a:spcAft>
+            </a:pPr>
+            <a:r>
+              <a:rPr sz="1500">
+                <a:solidFill>
+                  <a:srgbClr val="22282E"/>
+                </a:solidFill>
+              </a:rPr>
+              <a:t>•  Evidencia. Redacta 3 hallazgos con su evidencia reproducible.</a:t>
             </a:r>
           </a:p>
         </p:txBody>
@@ -3332,7 +3351,7 @@
                   <a:srgbClr val="0B3D2E"/>
                 </a:solidFill>
               </a:rPr>
-              <a:t>❓ Preguntas frecuentes</a:t>
+              <a:t>✍️ Ejercicios</a:t>
             </a:r>
           </a:p>
         </p:txBody>
@@ -3370,82 +3389,67 @@
                   <a:srgbClr val="22282E"/>
                 </a:solidFill>
               </a:rPr>
-              <a:t>•  ❓ ¿La IA encuentra vulnerabilidades web sola?</a:t>
-            </a:r>
-          </a:p>
-          <a:p>
-            <a:pPr>
-              <a:spcAft>
-                <a:spcPts val="600"/>
-              </a:spcAft>
-            </a:pPr>
-            <a:r>
-              <a:rPr sz="1500">
-                <a:solidFill>
-                  <a:srgbClr val="22282E"/>
-                </a:solidFill>
-              </a:rPr>
-              <a:t>•  Encuentra indicios y los resume; confirmarlos y descartar falsos positivos es tu trabajo. Sin</a:t>
-            </a:r>
-          </a:p>
-          <a:p>
-            <a:pPr>
-              <a:spcAft>
-                <a:spcPts val="600"/>
-              </a:spcAft>
-            </a:pPr>
-            <a:r>
-              <a:rPr sz="1500">
-                <a:solidFill>
-                  <a:srgbClr val="22282E"/>
-                </a:solidFill>
-              </a:rPr>
-              <a:t>•  validación, un informe lleno de falsos positivos destruye tu credibilidad.</a:t>
-            </a:r>
-          </a:p>
-          <a:p>
-            <a:pPr>
-              <a:spcAft>
-                <a:spcPts val="600"/>
-              </a:spcAft>
-            </a:pPr>
-            <a:r>
-              <a:rPr sz="1500">
-                <a:solidFill>
-                  <a:srgbClr val="22282E"/>
-                </a:solidFill>
-              </a:rPr>
-              <a:t>•  ❓ ¿El OSINT con IA es legal?</a:t>
-            </a:r>
-          </a:p>
-          <a:p>
-            <a:pPr>
-              <a:spcAft>
-                <a:spcPts val="600"/>
-              </a:spcAft>
-            </a:pPr>
-            <a:r>
-              <a:rPr sz="1500">
-                <a:solidFill>
-                  <a:srgbClr val="22282E"/>
-                </a:solidFill>
-              </a:rPr>
-              <a:t>•  Recolectar información pública suele serlo, pero el uso, la privacidad y la finalidad tienen</a:t>
-            </a:r>
-          </a:p>
-          <a:p>
-            <a:pPr>
-              <a:spcAft>
-                <a:spcPts val="600"/>
-              </a:spcAft>
-            </a:pPr>
-            <a:r>
-              <a:rPr sz="1500">
-                <a:solidFill>
-                  <a:srgbClr val="22282E"/>
-                </a:solidFill>
-              </a:rPr>
-              <a:t>•  límites legales que debes respetar (ver Parte 12 y clase 339).</a:t>
+              <a:t>•  ¿Dónde está el límite legal/ético del OSINT sobre personas?</a:t>
+            </a:r>
+          </a:p>
+          <a:p>
+            <a:pPr>
+              <a:spcAft>
+                <a:spcPts val="600"/>
+              </a:spcAft>
+            </a:pPr>
+            <a:r>
+              <a:rPr sz="1500">
+                <a:solidFill>
+                  <a:srgbClr val="22282E"/>
+                </a:solidFill>
+              </a:rPr>
+              <a:t>•  Da un ejemplo de falso positivo típico de un escáner web.</a:t>
+            </a:r>
+          </a:p>
+          <a:p>
+            <a:pPr>
+              <a:spcAft>
+                <a:spcPts val="600"/>
+              </a:spcAft>
+            </a:pPr>
+            <a:r>
+              <a:rPr sz="1500">
+                <a:solidFill>
+                  <a:srgbClr val="22282E"/>
+                </a:solidFill>
+              </a:rPr>
+              <a:t>•  ¿Cómo confirmarías una cabecera de seguridad ausente que reporta el agente?</a:t>
+            </a:r>
+          </a:p>
+          <a:p>
+            <a:pPr>
+              <a:spcAft>
+                <a:spcPts val="600"/>
+              </a:spcAft>
+            </a:pPr>
+            <a:r>
+              <a:rPr sz="1500">
+                <a:solidFill>
+                  <a:srgbClr val="22282E"/>
+                </a:solidFill>
+              </a:rPr>
+              <a:t>•  Diseña el flujo mínimo de una auditoría web asistida sobre tu app.</a:t>
+            </a:r>
+          </a:p>
+          <a:p>
+            <a:pPr>
+              <a:spcAft>
+                <a:spcPts val="600"/>
+              </a:spcAft>
+            </a:pPr>
+            <a:r>
+              <a:rPr sz="1500">
+                <a:solidFill>
+                  <a:srgbClr val="22282E"/>
+                </a:solidFill>
+              </a:rPr>
+              <a:t>•  ¿Qué datos de OSINT no incluirías en un informe por privacidad?</a:t>
             </a:r>
           </a:p>
         </p:txBody>
@@ -3496,7 +3500,7 @@
                   <a:srgbClr val="0B3D2E"/>
                 </a:solidFill>
               </a:rPr>
-              <a:t>🔗 Referencias</a:t>
+              <a:t>📝 Reto verificable</a:t>
             </a:r>
           </a:p>
         </p:txBody>
@@ -3534,6 +3538,438 @@
                   <a:srgbClr val="22282E"/>
                 </a:solidFill>
               </a:rPr>
+              <a:t>•  Realiza una auditoría web asistida sobre tu app de laboratorio y entrega 3 hallazgos validados</a:t>
+            </a:r>
+          </a:p>
+          <a:p>
+            <a:pPr>
+              <a:spcAft>
+                <a:spcPts val="600"/>
+              </a:spcAft>
+            </a:pPr>
+            <a:r>
+              <a:rPr sz="1500">
+                <a:solidFill>
+                  <a:srgbClr val="22282E"/>
+                </a:solidFill>
+              </a:rPr>
+              <a:t>•  manualmente + descarta explícitamente 2 falsos positivos que reportó el agente.</a:t>
+            </a:r>
+          </a:p>
+          <a:p>
+            <a:pPr>
+              <a:spcAft>
+                <a:spcPts val="600"/>
+              </a:spcAft>
+            </a:pPr>
+            <a:r>
+              <a:rPr sz="1500">
+                <a:solidFill>
+                  <a:srgbClr val="22282E"/>
+                </a:solidFill>
+              </a:rPr>
+              <a:t>•  Criterio de aceptación: los 3 hallazgos son reproducibles; explicas por qué los otros 2 no</a:t>
+            </a:r>
+          </a:p>
+          <a:p>
+            <a:pPr>
+              <a:spcAft>
+                <a:spcPts val="600"/>
+              </a:spcAft>
+            </a:pPr>
+            <a:r>
+              <a:rPr sz="1500">
+                <a:solidFill>
+                  <a:srgbClr val="22282E"/>
+                </a:solidFill>
+              </a:rPr>
+              <a:t>•  son explotables; todo el trabajo fue sobre un objetivo propio/autorizado.</a:t>
+            </a:r>
+          </a:p>
+        </p:txBody>
+      </p:sp>
+    </p:spTree>
+  </p:cSld>
+  <p:clrMapOvr>
+    <a:masterClrMapping/>
+  </p:clrMapOvr>
+</p:sld>
+</file>
+
+<file path=ppt/slides/slide13.xml><?xml version="1.0" encoding="utf-8"?>
+<p:sld xmlns:a="http://schemas.openxmlformats.org/drawingml/2006/main" xmlns:p="http://schemas.openxmlformats.org/presentationml/2006/main" xmlns:r="http://schemas.openxmlformats.org/officeDocument/2006/relationships">
+  <p:cSld>
+    <p:spTree>
+      <p:nvGrpSpPr>
+        <p:cNvPr id="1" name=""/>
+        <p:cNvGrpSpPr/>
+        <p:nvPr/>
+      </p:nvGrpSpPr>
+      <p:grpSpPr/>
+      <p:sp>
+        <p:nvSpPr>
+          <p:cNvPr id="2" name="TextBox 1"/>
+          <p:cNvSpPr txBox="1"/>
+          <p:nvPr/>
+        </p:nvSpPr>
+        <p:spPr>
+          <a:xfrm>
+            <a:off x="457200" y="320040"/>
+            <a:ext cx="8229600" cy="822960"/>
+          </a:xfrm>
+          <a:prstGeom prst="rect">
+            <a:avLst/>
+          </a:prstGeom>
+          <a:noFill/>
+        </p:spPr>
+        <p:txBody>
+          <a:bodyPr wrap="square">
+            <a:spAutoFit/>
+          </a:bodyPr>
+          <a:lstStyle/>
+          <a:p>
+            <a:r>
+              <a:rPr sz="2600" b="1">
+                <a:solidFill>
+                  <a:srgbClr val="0B3D2E"/>
+                </a:solidFill>
+              </a:rPr>
+              <a:t>⚠️ Errores comunes</a:t>
+            </a:r>
+          </a:p>
+        </p:txBody>
+      </p:sp>
+      <p:sp>
+        <p:nvSpPr>
+          <p:cNvPr id="3" name="TextBox 2"/>
+          <p:cNvSpPr txBox="1"/>
+          <p:nvPr/>
+        </p:nvSpPr>
+        <p:spPr>
+          <a:xfrm>
+            <a:off x="457200" y="1280160"/>
+            <a:ext cx="8229600" cy="4937760"/>
+          </a:xfrm>
+          <a:prstGeom prst="rect">
+            <a:avLst/>
+          </a:prstGeom>
+          <a:noFill/>
+        </p:spPr>
+        <p:txBody>
+          <a:bodyPr wrap="square">
+            <a:spAutoFit/>
+          </a:bodyPr>
+          <a:lstStyle/>
+          <a:p>
+            <a:pPr>
+              <a:spcAft>
+                <a:spcPts val="600"/>
+              </a:spcAft>
+            </a:pPr>
+            <a:r>
+              <a:rPr sz="1500">
+                <a:solidFill>
+                  <a:srgbClr val="22282E"/>
+                </a:solidFill>
+              </a:rPr>
+              <a:t>•  Tomar cada hallazgo del escáner como real — Sobre-reporte. Valida antes de incluirlo.</a:t>
+            </a:r>
+          </a:p>
+          <a:p>
+            <a:pPr>
+              <a:spcAft>
+                <a:spcPts val="600"/>
+              </a:spcAft>
+            </a:pPr>
+            <a:r>
+              <a:rPr sz="1500">
+                <a:solidFill>
+                  <a:srgbClr val="22282E"/>
+                </a:solidFill>
+              </a:rPr>
+              <a:t>•  Hacer OSINT intrusivo o sobre personas sin base — Cruza líneas legales/éticas. Limítate a lo público y pertinente.</a:t>
+            </a:r>
+          </a:p>
+          <a:p>
+            <a:pPr>
+              <a:spcAft>
+                <a:spcPts val="600"/>
+              </a:spcAft>
+            </a:pPr>
+            <a:r>
+              <a:rPr sz="1500">
+                <a:solidFill>
+                  <a:srgbClr val="22282E"/>
+                </a:solidFill>
+              </a:rPr>
+              <a:t>•  Auditar una web que no es tuya "para probar" — Ilegal sin permiso. Usa tu laboratorio.</a:t>
+            </a:r>
+          </a:p>
+          <a:p>
+            <a:pPr>
+              <a:spcAft>
+                <a:spcPts val="600"/>
+              </a:spcAft>
+            </a:pPr>
+            <a:r>
+              <a:rPr sz="1500">
+                <a:solidFill>
+                  <a:srgbClr val="22282E"/>
+                </a:solidFill>
+              </a:rPr>
+              <a:t>•  Confiar en versiones detectadas sin confirmar — El fingerprinting se equivoca; verifica.</a:t>
+            </a:r>
+          </a:p>
+        </p:txBody>
+      </p:sp>
+    </p:spTree>
+  </p:cSld>
+  <p:clrMapOvr>
+    <a:masterClrMapping/>
+  </p:clrMapOvr>
+</p:sld>
+</file>
+
+<file path=ppt/slides/slide14.xml><?xml version="1.0" encoding="utf-8"?>
+<p:sld xmlns:a="http://schemas.openxmlformats.org/drawingml/2006/main" xmlns:p="http://schemas.openxmlformats.org/presentationml/2006/main" xmlns:r="http://schemas.openxmlformats.org/officeDocument/2006/relationships">
+  <p:cSld>
+    <p:spTree>
+      <p:nvGrpSpPr>
+        <p:cNvPr id="1" name=""/>
+        <p:cNvGrpSpPr/>
+        <p:nvPr/>
+      </p:nvGrpSpPr>
+      <p:grpSpPr/>
+      <p:sp>
+        <p:nvSpPr>
+          <p:cNvPr id="2" name="TextBox 1"/>
+          <p:cNvSpPr txBox="1"/>
+          <p:nvPr/>
+        </p:nvSpPr>
+        <p:spPr>
+          <a:xfrm>
+            <a:off x="457200" y="320040"/>
+            <a:ext cx="8229600" cy="822960"/>
+          </a:xfrm>
+          <a:prstGeom prst="rect">
+            <a:avLst/>
+          </a:prstGeom>
+          <a:noFill/>
+        </p:spPr>
+        <p:txBody>
+          <a:bodyPr wrap="square">
+            <a:spAutoFit/>
+          </a:bodyPr>
+          <a:lstStyle/>
+          <a:p>
+            <a:r>
+              <a:rPr sz="2600" b="1">
+                <a:solidFill>
+                  <a:srgbClr val="0B3D2E"/>
+                </a:solidFill>
+              </a:rPr>
+              <a:t>❓ Preguntas frecuentes</a:t>
+            </a:r>
+          </a:p>
+        </p:txBody>
+      </p:sp>
+      <p:sp>
+        <p:nvSpPr>
+          <p:cNvPr id="3" name="TextBox 2"/>
+          <p:cNvSpPr txBox="1"/>
+          <p:nvPr/>
+        </p:nvSpPr>
+        <p:spPr>
+          <a:xfrm>
+            <a:off x="457200" y="1280160"/>
+            <a:ext cx="8229600" cy="4937760"/>
+          </a:xfrm>
+          <a:prstGeom prst="rect">
+            <a:avLst/>
+          </a:prstGeom>
+          <a:noFill/>
+        </p:spPr>
+        <p:txBody>
+          <a:bodyPr wrap="square">
+            <a:spAutoFit/>
+          </a:bodyPr>
+          <a:lstStyle/>
+          <a:p>
+            <a:pPr>
+              <a:spcAft>
+                <a:spcPts val="600"/>
+              </a:spcAft>
+            </a:pPr>
+            <a:r>
+              <a:rPr sz="1500">
+                <a:solidFill>
+                  <a:srgbClr val="22282E"/>
+                </a:solidFill>
+              </a:rPr>
+              <a:t>•  ❓ ¿La IA encuentra vulnerabilidades web sola?</a:t>
+            </a:r>
+          </a:p>
+          <a:p>
+            <a:pPr>
+              <a:spcAft>
+                <a:spcPts val="600"/>
+              </a:spcAft>
+            </a:pPr>
+            <a:r>
+              <a:rPr sz="1500">
+                <a:solidFill>
+                  <a:srgbClr val="22282E"/>
+                </a:solidFill>
+              </a:rPr>
+              <a:t>•  Encuentra indicios y los resume; confirmarlos y descartar falsos positivos es tu trabajo. Sin</a:t>
+            </a:r>
+          </a:p>
+          <a:p>
+            <a:pPr>
+              <a:spcAft>
+                <a:spcPts val="600"/>
+              </a:spcAft>
+            </a:pPr>
+            <a:r>
+              <a:rPr sz="1500">
+                <a:solidFill>
+                  <a:srgbClr val="22282E"/>
+                </a:solidFill>
+              </a:rPr>
+              <a:t>•  validación, un informe lleno de falsos positivos destruye tu credibilidad.</a:t>
+            </a:r>
+          </a:p>
+          <a:p>
+            <a:pPr>
+              <a:spcAft>
+                <a:spcPts val="600"/>
+              </a:spcAft>
+            </a:pPr>
+            <a:r>
+              <a:rPr sz="1500">
+                <a:solidFill>
+                  <a:srgbClr val="22282E"/>
+                </a:solidFill>
+              </a:rPr>
+              <a:t>•  ❓ ¿El OSINT con IA es legal?</a:t>
+            </a:r>
+          </a:p>
+          <a:p>
+            <a:pPr>
+              <a:spcAft>
+                <a:spcPts val="600"/>
+              </a:spcAft>
+            </a:pPr>
+            <a:r>
+              <a:rPr sz="1500">
+                <a:solidFill>
+                  <a:srgbClr val="22282E"/>
+                </a:solidFill>
+              </a:rPr>
+              <a:t>•  Recolectar información pública suele serlo, pero el uso, la privacidad y la finalidad tienen</a:t>
+            </a:r>
+          </a:p>
+          <a:p>
+            <a:pPr>
+              <a:spcAft>
+                <a:spcPts val="600"/>
+              </a:spcAft>
+            </a:pPr>
+            <a:r>
+              <a:rPr sz="1500">
+                <a:solidFill>
+                  <a:srgbClr val="22282E"/>
+                </a:solidFill>
+              </a:rPr>
+              <a:t>•  límites legales que debes respetar (ver Parte 12 y clase 339).</a:t>
+            </a:r>
+          </a:p>
+        </p:txBody>
+      </p:sp>
+    </p:spTree>
+  </p:cSld>
+  <p:clrMapOvr>
+    <a:masterClrMapping/>
+  </p:clrMapOvr>
+</p:sld>
+</file>
+
+<file path=ppt/slides/slide15.xml><?xml version="1.0" encoding="utf-8"?>
+<p:sld xmlns:a="http://schemas.openxmlformats.org/drawingml/2006/main" xmlns:p="http://schemas.openxmlformats.org/presentationml/2006/main" xmlns:r="http://schemas.openxmlformats.org/officeDocument/2006/relationships">
+  <p:cSld>
+    <p:spTree>
+      <p:nvGrpSpPr>
+        <p:cNvPr id="1" name=""/>
+        <p:cNvGrpSpPr/>
+        <p:nvPr/>
+      </p:nvGrpSpPr>
+      <p:grpSpPr/>
+      <p:sp>
+        <p:nvSpPr>
+          <p:cNvPr id="2" name="TextBox 1"/>
+          <p:cNvSpPr txBox="1"/>
+          <p:nvPr/>
+        </p:nvSpPr>
+        <p:spPr>
+          <a:xfrm>
+            <a:off x="457200" y="320040"/>
+            <a:ext cx="8229600" cy="822960"/>
+          </a:xfrm>
+          <a:prstGeom prst="rect">
+            <a:avLst/>
+          </a:prstGeom>
+          <a:noFill/>
+        </p:spPr>
+        <p:txBody>
+          <a:bodyPr wrap="square">
+            <a:spAutoFit/>
+          </a:bodyPr>
+          <a:lstStyle/>
+          <a:p>
+            <a:r>
+              <a:rPr sz="2600" b="1">
+                <a:solidFill>
+                  <a:srgbClr val="0B3D2E"/>
+                </a:solidFill>
+              </a:rPr>
+              <a:t>🔗 Referencias</a:t>
+            </a:r>
+          </a:p>
+        </p:txBody>
+      </p:sp>
+      <p:sp>
+        <p:nvSpPr>
+          <p:cNvPr id="3" name="TextBox 2"/>
+          <p:cNvSpPr txBox="1"/>
+          <p:nvPr/>
+        </p:nvSpPr>
+        <p:spPr>
+          <a:xfrm>
+            <a:off x="457200" y="1280160"/>
+            <a:ext cx="8229600" cy="4937760"/>
+          </a:xfrm>
+          <a:prstGeom prst="rect">
+            <a:avLst/>
+          </a:prstGeom>
+          <a:noFill/>
+        </p:spPr>
+        <p:txBody>
+          <a:bodyPr wrap="square">
+            <a:spAutoFit/>
+          </a:bodyPr>
+          <a:lstStyle/>
+          <a:p>
+            <a:pPr>
+              <a:spcAft>
+                <a:spcPts val="600"/>
+              </a:spcAft>
+            </a:pPr>
+            <a:r>
+              <a:rPr sz="1500">
+                <a:solidFill>
+                  <a:srgbClr val="22282E"/>
+                </a:solidFill>
+              </a:rPr>
               <a:t>•  OWASP Web Security Testing Guide (WSTG)</a:t>
             </a:r>
           </a:p>
@@ -3569,6 +4005,81 @@
           </a:p>
         </p:txBody>
       </p:sp>
+    </p:spTree>
+  </p:cSld>
+  <p:clrMapOvr>
+    <a:masterClrMapping/>
+  </p:clrMapOvr>
+</p:sld>
+</file>
+
+<file path=ppt/slides/slide16.xml><?xml version="1.0" encoding="utf-8"?>
+<p:sld xmlns:a="http://schemas.openxmlformats.org/drawingml/2006/main" xmlns:p="http://schemas.openxmlformats.org/presentationml/2006/main" xmlns:r="http://schemas.openxmlformats.org/officeDocument/2006/relationships">
+  <p:cSld>
+    <p:spTree>
+      <p:nvGrpSpPr>
+        <p:cNvPr id="1" name=""/>
+        <p:cNvGrpSpPr/>
+        <p:nvPr/>
+      </p:nvGrpSpPr>
+      <p:grpSpPr/>
+      <p:sp>
+        <p:nvSpPr>
+          <p:cNvPr id="2" name="TextBox 1"/>
+          <p:cNvSpPr txBox="1"/>
+          <p:nvPr/>
+        </p:nvSpPr>
+        <p:spPr>
+          <a:xfrm>
+            <a:off x="457200" y="274320"/>
+            <a:ext cx="8229600" cy="640080"/>
+          </a:xfrm>
+          <a:prstGeom prst="rect">
+            <a:avLst/>
+          </a:prstGeom>
+          <a:noFill/>
+        </p:spPr>
+        <p:txBody>
+          <a:bodyPr wrap="square">
+            <a:spAutoFit/>
+          </a:bodyPr>
+          <a:lstStyle/>
+          <a:p>
+            <a:r>
+              <a:rPr sz="2200" b="1">
+                <a:solidFill>
+                  <a:srgbClr val="0B3D2E"/>
+                </a:solidFill>
+              </a:rPr>
+              <a:t>Diagrama de la clase</a:t>
+            </a:r>
+          </a:p>
+        </p:txBody>
+      </p:sp>
+      <p:pic>
+        <p:nvPicPr>
+          <p:cNvPr id="3" name="Picture 2" descr="770caefbf5751d4d.png"/>
+          <p:cNvPicPr>
+            <a:picLocks noChangeAspect="1"/>
+          </p:cNvPicPr>
+          <p:nvPr/>
+        </p:nvPicPr>
+        <p:blipFill>
+          <a:blip r:embed="rId2"/>
+          <a:stretch>
+            <a:fillRect/>
+          </a:stretch>
+        </p:blipFill>
+        <p:spPr>
+          <a:xfrm>
+            <a:off x="457200" y="3315251"/>
+            <a:ext cx="8229600" cy="867578"/>
+          </a:xfrm>
+          <a:prstGeom prst="rect">
+            <a:avLst/>
+          </a:prstGeom>
+        </p:spPr>
+      </p:pic>
     </p:spTree>
   </p:cSld>
   <p:clrMapOvr>
@@ -4047,7 +4558,7 @@
                   <a:srgbClr val="0B3D2E"/>
                 </a:solidFill>
               </a:rPr>
-              <a:t>📖 Definiciones y características</a:t>
+              <a:t>🧠 Explicación en profundidad</a:t>
             </a:r>
           </a:p>
         </p:txBody>
@@ -4085,97 +4596,37 @@
                   <a:srgbClr val="22282E"/>
                 </a:solidFill>
               </a:rPr>
-              <a:t>•  OSINT (Open Source Intelligence)</a:t>
-            </a:r>
-          </a:p>
-          <a:p>
-            <a:pPr>
-              <a:spcAft>
-                <a:spcPts val="600"/>
-              </a:spcAft>
-            </a:pPr>
-            <a:r>
-              <a:rPr sz="1500">
-                <a:solidFill>
-                  <a:srgbClr val="22282E"/>
-                </a:solidFill>
-              </a:rPr>
-              <a:t>•  Inteligencia obtenida de fuentes públicas. Característica clave: es legal recolectar lo público, pero su uso y la privacidad tienen límites.</a:t>
-            </a:r>
-          </a:p>
-          <a:p>
-            <a:pPr>
-              <a:spcAft>
-                <a:spcPts val="600"/>
-              </a:spcAft>
-            </a:pPr>
-            <a:r>
-              <a:rPr sz="1500">
-                <a:solidFill>
-                  <a:srgbClr val="22282E"/>
-                </a:solidFill>
-              </a:rPr>
-              <a:t>•  Fingerprinting web</a:t>
-            </a:r>
-          </a:p>
-          <a:p>
-            <a:pPr>
-              <a:spcAft>
-                <a:spcPts val="600"/>
-              </a:spcAft>
-            </a:pPr>
-            <a:r>
-              <a:rPr sz="1500">
-                <a:solidFill>
-                  <a:srgbClr val="22282E"/>
-                </a:solidFill>
-              </a:rPr>
-              <a:t>•  Identificar tecnologías, versiones y CMS de una aplicación (p. ej. WordPress y sus plugins) para orientar la auditoría.</a:t>
-            </a:r>
-          </a:p>
-          <a:p>
-            <a:pPr>
-              <a:spcAft>
-                <a:spcPts val="600"/>
-              </a:spcAft>
-            </a:pPr>
-            <a:r>
-              <a:rPr sz="1500">
-                <a:solidFill>
-                  <a:srgbClr val="22282E"/>
-                </a:solidFill>
-              </a:rPr>
-              <a:t>•  Falso positivo</a:t>
-            </a:r>
-          </a:p>
-          <a:p>
-            <a:pPr>
-              <a:spcAft>
-                <a:spcPts val="600"/>
-              </a:spcAft>
-            </a:pPr>
-            <a:r>
-              <a:rPr sz="1500">
-                <a:solidFill>
-                  <a:srgbClr val="22282E"/>
-                </a:solidFill>
-              </a:rPr>
-              <a:t>•  Hallazgo reportado que no es explotable o no existe. La IA, como los escáneres, los produce; validarlos es parte del trabajo.</a:t>
-            </a:r>
-          </a:p>
-          <a:p>
-            <a:pPr>
-              <a:spcAft>
-                <a:spcPts val="600"/>
-              </a:spcAft>
-            </a:pPr>
-            <a:r>
-              <a:rPr sz="1500">
-                <a:solidFill>
-                  <a:srgbClr val="22282E"/>
-                </a:solidFill>
-              </a:rPr>
-              <a:t>•  Síntesis de evidencia</a:t>
+              <a:t>•  Un agente OSINT puede propagar homónimos y una auditoría web puede seguir enlaces fuera de alcance. Las fuentes conservan procedencia, las entidades mantienen alternativas y cada navegación valida…</a:t>
+            </a:r>
+          </a:p>
+          <a:p>
+            <a:pPr>
+              <a:spcAft>
+                <a:spcPts val="600"/>
+              </a:spcAft>
+            </a:pPr>
+            <a:r>
+              <a:rPr sz="1500">
+                <a:solidFill>
+                  <a:srgbClr val="22282E"/>
+                </a:solidFill>
+              </a:rPr>
+              <a:t>•  El diagrama separa lenguaje de autoridad. El modelo puede proponer; la política determina si la operación pertenece al alcance; la herramienta produce evidencia; y una persona o control determinista…</a:t>
+            </a:r>
+          </a:p>
+          <a:p>
+            <a:pPr>
+              <a:spcAft>
+                <a:spcPts val="600"/>
+              </a:spcAft>
+            </a:pPr>
+            <a:r>
+              <a:rPr sz="1500">
+                <a:solidFill>
+                  <a:srgbClr val="22282E"/>
+                </a:solidFill>
+              </a:rPr>
+              <a:t>•  Dos perfiles comparten alias. El agente mantiene nodos separados hasta encontrar evidencia independiente.</a:t>
             </a:r>
           </a:p>
         </p:txBody>
@@ -4226,7 +4677,7 @@
                   <a:srgbClr val="0B3D2E"/>
                 </a:solidFill>
               </a:rPr>
-              <a:t>🧰 Herramientas y preparación</a:t>
+              <a:t>📔 Glosario operativo</a:t>
             </a:r>
           </a:p>
         </p:txBody>
@@ -4264,37 +4715,52 @@
                   <a:srgbClr val="22282E"/>
                 </a:solidFill>
               </a:rPr>
-              <a:t>•  kali-mcp con los flujos de OSINT y auditoría web, contra una app propia (p. ej. el</a:t>
-            </a:r>
-          </a:p>
-          <a:p>
-            <a:pPr>
-              <a:spcAft>
-                <a:spcPts val="600"/>
-              </a:spcAft>
-            </a:pPr>
-            <a:r>
-              <a:rPr sz="1500">
-                <a:solidFill>
-                  <a:srgbClr val="22282E"/>
-                </a:solidFill>
-              </a:rPr>
-              <a:t>•  lab appsec-web o un WordPress de laboratorio). Herramientas</a:t>
-            </a:r>
-          </a:p>
-          <a:p>
-            <a:pPr>
-              <a:spcAft>
-                <a:spcPts val="600"/>
-              </a:spcAft>
-            </a:pPr>
-            <a:r>
-              <a:rPr sz="1500">
-                <a:solidFill>
-                  <a:srgbClr val="22282E"/>
-                </a:solidFill>
-              </a:rPr>
-              <a:t>•  orquestadas típicas: whatweb, gobuster/ffuf, nikto, wpscan.</a:t>
+              <a:t>•  Término — Definición</a:t>
+            </a:r>
+          </a:p>
+          <a:p>
+            <a:pPr>
+              <a:spcAft>
+                <a:spcPts val="600"/>
+              </a:spcAft>
+            </a:pPr>
+            <a:r>
+              <a:rPr sz="1500">
+                <a:solidFill>
+                  <a:srgbClr val="22282E"/>
+                </a:solidFill>
+              </a:rPr>
+              <a:t>•  Entity resolution — Evaluación de si registros representan la misma entidad.</a:t>
+            </a:r>
+          </a:p>
+          <a:p>
+            <a:pPr>
+              <a:spcAft>
+                <a:spcPts val="600"/>
+              </a:spcAft>
+            </a:pPr>
+            <a:r>
+              <a:rPr sz="1500">
+                <a:solidFill>
+                  <a:srgbClr val="22282E"/>
+                </a:solidFill>
+              </a:rPr>
+              <a:t>•  Guardrail — Capa que reduce una capacidad o detecta su uso; no garantía absoluta.</a:t>
+            </a:r>
+          </a:p>
+          <a:p>
+            <a:pPr>
+              <a:spcAft>
+                <a:spcPts val="600"/>
+              </a:spcAft>
+            </a:pPr>
+            <a:r>
+              <a:rPr sz="1500">
+                <a:solidFill>
+                  <a:srgbClr val="22282E"/>
+                </a:solidFill>
+              </a:rPr>
+              <a:t>•  Audit trail — Registro ordenado de solicitudes, decisiones, ejecuciones y resultados.</a:t>
             </a:r>
           </a:p>
         </p:txBody>
@@ -4345,7 +4811,7 @@
                   <a:srgbClr val="0B3D2E"/>
                 </a:solidFill>
               </a:rPr>
-              <a:t>🧪 Laboratorio guiado</a:t>
+              <a:t>✅ Criterio de dominio</a:t>
             </a:r>
           </a:p>
         </p:txBody>
@@ -4383,67 +4849,7 @@
                   <a:srgbClr val="22282E"/>
                 </a:solidFill>
               </a:rPr>
-              <a:t>•  OSINT de dominio propio. Pide al agente un resumen de la huella pública de un dominio tuyo y verifica cada dato (DNS, subdominios) a mano.</a:t>
-            </a:r>
-          </a:p>
-          <a:p>
-            <a:pPr>
-              <a:spcAft>
-                <a:spcPts val="600"/>
-              </a:spcAft>
-            </a:pPr>
-            <a:r>
-              <a:rPr sz="1500">
-                <a:solidFill>
-                  <a:srgbClr val="22282E"/>
-                </a:solidFill>
-              </a:rPr>
-              <a:t>•  Fingerprinting. Sobre tu app de laboratorio, ejecuta el flujo de auditoría web y revisa la tecnología detectada.</a:t>
-            </a:r>
-          </a:p>
-          <a:p>
-            <a:pPr>
-              <a:spcAft>
-                <a:spcPts val="600"/>
-              </a:spcAft>
-            </a:pPr>
-            <a:r>
-              <a:rPr sz="1500">
-                <a:solidFill>
-                  <a:srgbClr val="22282E"/>
-                </a:solidFill>
-              </a:rPr>
-              <a:t>•  Checks OWASP. Deja que el agente proponga posibles problemas (cabeceras, versiones) y clasifícalos en confirmado / a verificar / falso positivo.</a:t>
-            </a:r>
-          </a:p>
-          <a:p>
-            <a:pPr>
-              <a:spcAft>
-                <a:spcPts val="600"/>
-              </a:spcAft>
-            </a:pPr>
-            <a:r>
-              <a:rPr sz="1500">
-                <a:solidFill>
-                  <a:srgbClr val="22282E"/>
-                </a:solidFill>
-              </a:rPr>
-              <a:t>•  Validación. Confirma manualmente 3 hallazgos con Burp/curl.</a:t>
-            </a:r>
-          </a:p>
-          <a:p>
-            <a:pPr>
-              <a:spcAft>
-                <a:spcPts val="600"/>
-              </a:spcAft>
-            </a:pPr>
-            <a:r>
-              <a:rPr sz="1500">
-                <a:solidFill>
-                  <a:srgbClr val="22282E"/>
-                </a:solidFill>
-              </a:rPr>
-              <a:t>•  Evidencia. Redacta 3 hallazgos con su evidencia reproducible.</a:t>
+              <a:t>•  El alumno demuestra dominio cuando reproduce el flujo completo, puede atribuir cada acción, evita que texto no confiable otorgue autoridad y explica qué control contiene un fallo del modelo.</a:t>
             </a:r>
           </a:p>
         </p:txBody>
@@ -4494,7 +4900,7 @@
                   <a:srgbClr val="0B3D2E"/>
                 </a:solidFill>
               </a:rPr>
-              <a:t>✍️ Ejercicios</a:t>
+              <a:t>📖 Definiciones y características</a:t>
             </a:r>
           </a:p>
         </p:txBody>
@@ -4532,67 +4938,97 @@
                   <a:srgbClr val="22282E"/>
                 </a:solidFill>
               </a:rPr>
-              <a:t>•  ¿Dónde está el límite legal/ético del OSINT sobre personas?</a:t>
-            </a:r>
-          </a:p>
-          <a:p>
-            <a:pPr>
-              <a:spcAft>
-                <a:spcPts val="600"/>
-              </a:spcAft>
-            </a:pPr>
-            <a:r>
-              <a:rPr sz="1500">
-                <a:solidFill>
-                  <a:srgbClr val="22282E"/>
-                </a:solidFill>
-              </a:rPr>
-              <a:t>•  Da un ejemplo de falso positivo típico de un escáner web.</a:t>
-            </a:r>
-          </a:p>
-          <a:p>
-            <a:pPr>
-              <a:spcAft>
-                <a:spcPts val="600"/>
-              </a:spcAft>
-            </a:pPr>
-            <a:r>
-              <a:rPr sz="1500">
-                <a:solidFill>
-                  <a:srgbClr val="22282E"/>
-                </a:solidFill>
-              </a:rPr>
-              <a:t>•  ¿Cómo confirmarías una cabecera de seguridad ausente que reporta el agente?</a:t>
-            </a:r>
-          </a:p>
-          <a:p>
-            <a:pPr>
-              <a:spcAft>
-                <a:spcPts val="600"/>
-              </a:spcAft>
-            </a:pPr>
-            <a:r>
-              <a:rPr sz="1500">
-                <a:solidFill>
-                  <a:srgbClr val="22282E"/>
-                </a:solidFill>
-              </a:rPr>
-              <a:t>•  Diseña el flujo mínimo de una auditoría web asistida sobre tu app.</a:t>
-            </a:r>
-          </a:p>
-          <a:p>
-            <a:pPr>
-              <a:spcAft>
-                <a:spcPts val="600"/>
-              </a:spcAft>
-            </a:pPr>
-            <a:r>
-              <a:rPr sz="1500">
-                <a:solidFill>
-                  <a:srgbClr val="22282E"/>
-                </a:solidFill>
-              </a:rPr>
-              <a:t>•  ¿Qué datos de OSINT no incluirías en un informe por privacidad?</a:t>
+              <a:t>•  OSINT (Open Source Intelligence)</a:t>
+            </a:r>
+          </a:p>
+          <a:p>
+            <a:pPr>
+              <a:spcAft>
+                <a:spcPts val="600"/>
+              </a:spcAft>
+            </a:pPr>
+            <a:r>
+              <a:rPr sz="1500">
+                <a:solidFill>
+                  <a:srgbClr val="22282E"/>
+                </a:solidFill>
+              </a:rPr>
+              <a:t>•  Inteligencia obtenida de fuentes públicas. Característica clave: es legal recolectar lo público, pero su uso y la privacidad tienen límites.</a:t>
+            </a:r>
+          </a:p>
+          <a:p>
+            <a:pPr>
+              <a:spcAft>
+                <a:spcPts val="600"/>
+              </a:spcAft>
+            </a:pPr>
+            <a:r>
+              <a:rPr sz="1500">
+                <a:solidFill>
+                  <a:srgbClr val="22282E"/>
+                </a:solidFill>
+              </a:rPr>
+              <a:t>•  Fingerprinting web</a:t>
+            </a:r>
+          </a:p>
+          <a:p>
+            <a:pPr>
+              <a:spcAft>
+                <a:spcPts val="600"/>
+              </a:spcAft>
+            </a:pPr>
+            <a:r>
+              <a:rPr sz="1500">
+                <a:solidFill>
+                  <a:srgbClr val="22282E"/>
+                </a:solidFill>
+              </a:rPr>
+              <a:t>•  Identificar tecnologías, versiones y CMS de una aplicación (p. ej. WordPress y sus plugins) para orientar la auditoría.</a:t>
+            </a:r>
+          </a:p>
+          <a:p>
+            <a:pPr>
+              <a:spcAft>
+                <a:spcPts val="600"/>
+              </a:spcAft>
+            </a:pPr>
+            <a:r>
+              <a:rPr sz="1500">
+                <a:solidFill>
+                  <a:srgbClr val="22282E"/>
+                </a:solidFill>
+              </a:rPr>
+              <a:t>•  Falso positivo</a:t>
+            </a:r>
+          </a:p>
+          <a:p>
+            <a:pPr>
+              <a:spcAft>
+                <a:spcPts val="600"/>
+              </a:spcAft>
+            </a:pPr>
+            <a:r>
+              <a:rPr sz="1500">
+                <a:solidFill>
+                  <a:srgbClr val="22282E"/>
+                </a:solidFill>
+              </a:rPr>
+              <a:t>•  Hallazgo reportado que no es explotable o no existe. La IA, como los escáneres, los produce; validarlos es parte del trabajo.</a:t>
+            </a:r>
+          </a:p>
+          <a:p>
+            <a:pPr>
+              <a:spcAft>
+                <a:spcPts val="600"/>
+              </a:spcAft>
+            </a:pPr>
+            <a:r>
+              <a:rPr sz="1500">
+                <a:solidFill>
+                  <a:srgbClr val="22282E"/>
+                </a:solidFill>
+              </a:rPr>
+              <a:t>•  Síntesis de evidencia</a:t>
             </a:r>
           </a:p>
         </p:txBody>
@@ -4643,7 +5079,7 @@
                   <a:srgbClr val="0B3D2E"/>
                 </a:solidFill>
               </a:rPr>
-              <a:t>📝 Reto verificable</a:t>
+              <a:t>🧰 Herramientas y preparación</a:t>
             </a:r>
           </a:p>
         </p:txBody>
@@ -4681,52 +5117,37 @@
                   <a:srgbClr val="22282E"/>
                 </a:solidFill>
               </a:rPr>
-              <a:t>•  Realiza una auditoría web asistida sobre tu app de laboratorio y entrega 3 hallazgos validados</a:t>
-            </a:r>
-          </a:p>
-          <a:p>
-            <a:pPr>
-              <a:spcAft>
-                <a:spcPts val="600"/>
-              </a:spcAft>
-            </a:pPr>
-            <a:r>
-              <a:rPr sz="1500">
-                <a:solidFill>
-                  <a:srgbClr val="22282E"/>
-                </a:solidFill>
-              </a:rPr>
-              <a:t>•  manualmente + descarta explícitamente 2 falsos positivos que reportó el agente.</a:t>
-            </a:r>
-          </a:p>
-          <a:p>
-            <a:pPr>
-              <a:spcAft>
-                <a:spcPts val="600"/>
-              </a:spcAft>
-            </a:pPr>
-            <a:r>
-              <a:rPr sz="1500">
-                <a:solidFill>
-                  <a:srgbClr val="22282E"/>
-                </a:solidFill>
-              </a:rPr>
-              <a:t>•  Criterio de aceptación: los 3 hallazgos son reproducibles; explicas por qué los otros 2 no</a:t>
-            </a:r>
-          </a:p>
-          <a:p>
-            <a:pPr>
-              <a:spcAft>
-                <a:spcPts val="600"/>
-              </a:spcAft>
-            </a:pPr>
-            <a:r>
-              <a:rPr sz="1500">
-                <a:solidFill>
-                  <a:srgbClr val="22282E"/>
-                </a:solidFill>
-              </a:rPr>
-              <a:t>•  son explotables; todo el trabajo fue sobre un objetivo propio/autorizado.</a:t>
+              <a:t>•  kali-mcp con los flujos de OSINT y auditoría web, contra una app propia (p. ej. el</a:t>
+            </a:r>
+          </a:p>
+          <a:p>
+            <a:pPr>
+              <a:spcAft>
+                <a:spcPts val="600"/>
+              </a:spcAft>
+            </a:pPr>
+            <a:r>
+              <a:rPr sz="1500">
+                <a:solidFill>
+                  <a:srgbClr val="22282E"/>
+                </a:solidFill>
+              </a:rPr>
+              <a:t>•  lab appsec-web o un WordPress de laboratorio). Herramientas</a:t>
+            </a:r>
+          </a:p>
+          <a:p>
+            <a:pPr>
+              <a:spcAft>
+                <a:spcPts val="600"/>
+              </a:spcAft>
+            </a:pPr>
+            <a:r>
+              <a:rPr sz="1500">
+                <a:solidFill>
+                  <a:srgbClr val="22282E"/>
+                </a:solidFill>
+              </a:rPr>
+              <a:t>•  orquestadas típicas: whatweb, gobuster/ffuf, nikto, wpscan.</a:t>
             </a:r>
           </a:p>
         </p:txBody>
